--- a/examples/recreations/12_Dropbox_aReuben__Fall 2018_Math Schedule/out_mat2ppt.pptx
+++ b/examples/recreations/12_Dropbox_aReuben__Fall 2018_Math Schedule/out_mat2ppt.pptx
@@ -1,19 +1,19 @@
 
 <file path=ppt/presentation.xml><?xml version="1.0" encoding="utf-8"?>
-<p:presentation xmlns:a="http://schemas.openxmlformats.org/drawingml/2006/main" xmlns:r="http://schemas.openxmlformats.org/officeDocument/2006/relationships" xmlns:p="http://schemas.openxmlformats.org/presentationml/2006/main" saveSubsetFonts="1" autoCompressPictures="0">
+<p:presentation xmlns:a="http://schemas.openxmlformats.org/drawingml/2006/main" xmlns:r="http://schemas.openxmlformats.org/officeDocument/2006/relationships" xmlns:p="http://schemas.openxmlformats.org/presentationml/2006/main" saveSubsetFonts="1">
   <p:sldMasterIdLst>
     <p:sldMasterId id="2147483648" r:id="rId1"/>
   </p:sldMasterIdLst>
   <p:sldIdLst>
     <p:sldId id="256" r:id="rId7"/>
   </p:sldIdLst>
-  <p:sldSz cx="12192000" cy="6858000" type="screen4x3"/>
+  <p:sldSz cx="12192000" cy="6858000"/>
   <p:notesSz cx="6858000" cy="9144000"/>
   <p:defaultTextStyle>
     <a:defPPr>
       <a:defRPr lang="en-US"/>
     </a:defPPr>
-    <a:lvl1pPr marL="0" algn="l" defTabSz="457200" rtl="0" eaLnBrk="1" latinLnBrk="0" hangingPunct="1">
+    <a:lvl1pPr marL="0" algn="l" defTabSz="914400" rtl="0" eaLnBrk="1" latinLnBrk="0" hangingPunct="1">
       <a:defRPr sz="1800" kern="1200">
         <a:solidFill>
           <a:schemeClr val="tx1"/>
@@ -23,7 +23,7 @@
         <a:cs typeface="+mn-cs"/>
       </a:defRPr>
     </a:lvl1pPr>
-    <a:lvl2pPr marL="457200" algn="l" defTabSz="457200" rtl="0" eaLnBrk="1" latinLnBrk="0" hangingPunct="1">
+    <a:lvl2pPr marL="457200" algn="l" defTabSz="914400" rtl="0" eaLnBrk="1" latinLnBrk="0" hangingPunct="1">
       <a:defRPr sz="1800" kern="1200">
         <a:solidFill>
           <a:schemeClr val="tx1"/>
@@ -33,7 +33,7 @@
         <a:cs typeface="+mn-cs"/>
       </a:defRPr>
     </a:lvl2pPr>
-    <a:lvl3pPr marL="914400" algn="l" defTabSz="457200" rtl="0" eaLnBrk="1" latinLnBrk="0" hangingPunct="1">
+    <a:lvl3pPr marL="914400" algn="l" defTabSz="914400" rtl="0" eaLnBrk="1" latinLnBrk="0" hangingPunct="1">
       <a:defRPr sz="1800" kern="1200">
         <a:solidFill>
           <a:schemeClr val="tx1"/>
@@ -43,7 +43,7 @@
         <a:cs typeface="+mn-cs"/>
       </a:defRPr>
     </a:lvl3pPr>
-    <a:lvl4pPr marL="1371600" algn="l" defTabSz="457200" rtl="0" eaLnBrk="1" latinLnBrk="0" hangingPunct="1">
+    <a:lvl4pPr marL="1371600" algn="l" defTabSz="914400" rtl="0" eaLnBrk="1" latinLnBrk="0" hangingPunct="1">
       <a:defRPr sz="1800" kern="1200">
         <a:solidFill>
           <a:schemeClr val="tx1"/>
@@ -53,7 +53,7 @@
         <a:cs typeface="+mn-cs"/>
       </a:defRPr>
     </a:lvl4pPr>
-    <a:lvl5pPr marL="1828800" algn="l" defTabSz="457200" rtl="0" eaLnBrk="1" latinLnBrk="0" hangingPunct="1">
+    <a:lvl5pPr marL="1828800" algn="l" defTabSz="914400" rtl="0" eaLnBrk="1" latinLnBrk="0" hangingPunct="1">
       <a:defRPr sz="1800" kern="1200">
         <a:solidFill>
           <a:schemeClr val="tx1"/>
@@ -63,7 +63,7 @@
         <a:cs typeface="+mn-cs"/>
       </a:defRPr>
     </a:lvl5pPr>
-    <a:lvl6pPr marL="2286000" algn="l" defTabSz="457200" rtl="0" eaLnBrk="1" latinLnBrk="0" hangingPunct="1">
+    <a:lvl6pPr marL="2286000" algn="l" defTabSz="914400" rtl="0" eaLnBrk="1" latinLnBrk="0" hangingPunct="1">
       <a:defRPr sz="1800" kern="1200">
         <a:solidFill>
           <a:schemeClr val="tx1"/>
@@ -73,7 +73,7 @@
         <a:cs typeface="+mn-cs"/>
       </a:defRPr>
     </a:lvl6pPr>
-    <a:lvl7pPr marL="2743200" algn="l" defTabSz="457200" rtl="0" eaLnBrk="1" latinLnBrk="0" hangingPunct="1">
+    <a:lvl7pPr marL="2743200" algn="l" defTabSz="914400" rtl="0" eaLnBrk="1" latinLnBrk="0" hangingPunct="1">
       <a:defRPr sz="1800" kern="1200">
         <a:solidFill>
           <a:schemeClr val="tx1"/>
@@ -83,7 +83,7 @@
         <a:cs typeface="+mn-cs"/>
       </a:defRPr>
     </a:lvl7pPr>
-    <a:lvl8pPr marL="3200400" algn="l" defTabSz="457200" rtl="0" eaLnBrk="1" latinLnBrk="0" hangingPunct="1">
+    <a:lvl8pPr marL="3200400" algn="l" defTabSz="914400" rtl="0" eaLnBrk="1" latinLnBrk="0" hangingPunct="1">
       <a:defRPr sz="1800" kern="1200">
         <a:solidFill>
           <a:schemeClr val="tx1"/>
@@ -93,7 +93,7 @@
         <a:cs typeface="+mn-cs"/>
       </a:defRPr>
     </a:lvl8pPr>
-    <a:lvl9pPr marL="3657600" algn="l" defTabSz="457200" rtl="0" eaLnBrk="1" latinLnBrk="0" hangingPunct="1">
+    <a:lvl9pPr marL="3657600" algn="l" defTabSz="914400" rtl="0" eaLnBrk="1" latinLnBrk="0" hangingPunct="1">
       <a:defRPr sz="1800" kern="1200">
         <a:solidFill>
           <a:schemeClr val="tx1"/>
@@ -136,13 +136,17 @@
         </p:nvSpPr>
         <p:spPr>
           <a:xfrm>
-            <a:off x="685800" y="2130425"/>
-            <a:ext cx="7772400" cy="1470025"/>
+            <a:off x="1524000" y="1122363"/>
+            <a:ext cx="9144000" cy="2387600"/>
           </a:xfrm>
         </p:spPr>
         <p:txBody>
-          <a:bodyPr/>
-          <a:lstStyle/>
+          <a:bodyPr anchor="b"/>
+          <a:lstStyle>
+            <a:lvl1pPr algn="ctr">
+              <a:defRPr sz="6000"/>
+            </a:lvl1pPr>
+          </a:lstStyle>
           <a:p>
             <a:r>
               <a:rPr lang="en-US" smtClean="0"/>
@@ -164,8 +168,8 @@
         </p:nvSpPr>
         <p:spPr>
           <a:xfrm>
-            <a:off x="1371600" y="3886200"/>
-            <a:ext cx="6400800" cy="1752600"/>
+            <a:off x="1524000" y="3602038"/>
+            <a:ext cx="9144000" cy="1655762"/>
           </a:xfrm>
         </p:spPr>
         <p:txBody>
@@ -173,93 +177,39 @@
           <a:lstStyle>
             <a:lvl1pPr marL="0" indent="0" algn="ctr">
               <a:buNone/>
-              <a:defRPr>
-                <a:solidFill>
-                  <a:schemeClr val="tx1">
-                    <a:tint val="75000"/>
-                  </a:schemeClr>
-                </a:solidFill>
-              </a:defRPr>
+              <a:defRPr sz="2400"/>
             </a:lvl1pPr>
             <a:lvl2pPr marL="457200" indent="0" algn="ctr">
               <a:buNone/>
-              <a:defRPr>
-                <a:solidFill>
-                  <a:schemeClr val="tx1">
-                    <a:tint val="75000"/>
-                  </a:schemeClr>
-                </a:solidFill>
-              </a:defRPr>
+              <a:defRPr sz="2000"/>
             </a:lvl2pPr>
             <a:lvl3pPr marL="914400" indent="0" algn="ctr">
               <a:buNone/>
-              <a:defRPr>
-                <a:solidFill>
-                  <a:schemeClr val="tx1">
-                    <a:tint val="75000"/>
-                  </a:schemeClr>
-                </a:solidFill>
-              </a:defRPr>
+              <a:defRPr sz="1800"/>
             </a:lvl3pPr>
             <a:lvl4pPr marL="1371600" indent="0" algn="ctr">
               <a:buNone/>
-              <a:defRPr>
-                <a:solidFill>
-                  <a:schemeClr val="tx1">
-                    <a:tint val="75000"/>
-                  </a:schemeClr>
-                </a:solidFill>
-              </a:defRPr>
+              <a:defRPr sz="1600"/>
             </a:lvl4pPr>
             <a:lvl5pPr marL="1828800" indent="0" algn="ctr">
               <a:buNone/>
-              <a:defRPr>
-                <a:solidFill>
-                  <a:schemeClr val="tx1">
-                    <a:tint val="75000"/>
-                  </a:schemeClr>
-                </a:solidFill>
-              </a:defRPr>
+              <a:defRPr sz="1600"/>
             </a:lvl5pPr>
             <a:lvl6pPr marL="2286000" indent="0" algn="ctr">
               <a:buNone/>
-              <a:defRPr>
-                <a:solidFill>
-                  <a:schemeClr val="tx1">
-                    <a:tint val="75000"/>
-                  </a:schemeClr>
-                </a:solidFill>
-              </a:defRPr>
+              <a:defRPr sz="1600"/>
             </a:lvl6pPr>
             <a:lvl7pPr marL="2743200" indent="0" algn="ctr">
               <a:buNone/>
-              <a:defRPr>
-                <a:solidFill>
-                  <a:schemeClr val="tx1">
-                    <a:tint val="75000"/>
-                  </a:schemeClr>
-                </a:solidFill>
-              </a:defRPr>
+              <a:defRPr sz="1600"/>
             </a:lvl7pPr>
             <a:lvl8pPr marL="3200400" indent="0" algn="ctr">
               <a:buNone/>
-              <a:defRPr>
-                <a:solidFill>
-                  <a:schemeClr val="tx1">
-                    <a:tint val="75000"/>
-                  </a:schemeClr>
-                </a:solidFill>
-              </a:defRPr>
+              <a:defRPr sz="1600"/>
             </a:lvl8pPr>
             <a:lvl9pPr marL="3657600" indent="0" algn="ctr">
               <a:buNone/>
-              <a:defRPr>
-                <a:solidFill>
-                  <a:schemeClr val="tx1">
-                    <a:tint val="75000"/>
-                  </a:schemeClr>
-                </a:solidFill>
-              </a:defRPr>
+              <a:defRPr sz="1600"/>
             </a:lvl9pPr>
           </a:lstStyle>
           <a:p>
@@ -286,9 +236,9 @@
           <a:bodyPr/>
           <a:lstStyle/>
           <a:p>
-            <a:fld id="{5BCAD085-E8A6-8845-BD4E-CB4CCA059FC4}" type="datetimeFigureOut">
-              <a:rPr lang="en-US" smtClean="0"/>
-              <a:t>1/27/13</a:t>
+            <a:fld id="{A2E06B35-E8FD-4952-9B44-972A066DD42C}" type="datetimeFigureOut">
+              <a:rPr lang="en-US" smtClean="0"/>
+              <a:t>5/14/2018</a:t>
             </a:fld>
             <a:endParaRPr lang="en-US"/>
           </a:p>
@@ -328,7 +278,7 @@
           <a:bodyPr/>
           <a:lstStyle/>
           <a:p>
-            <a:fld id="{C1FF6DA9-008F-8B48-92A6-B652298478BF}" type="slidenum">
+            <a:fld id="{DCFC856B-C097-468E-A17D-914F19584995}" type="slidenum">
               <a:rPr lang="en-US" smtClean="0"/>
               <a:t>‹#›</a:t>
             </a:fld>
@@ -339,7 +289,7 @@
     </p:spTree>
     <p:extLst>
       <p:ext uri="{BB962C8B-B14F-4D97-AF65-F5344CB8AC3E}">
-        <p14:creationId xmlns:p14="http://schemas.microsoft.com/office/powerpoint/2010/main" val="3168075583"/>
+        <p14:creationId xmlns:p14="http://schemas.microsoft.com/office/powerpoint/2010/main" val="2703445642"/>
       </p:ext>
     </p:extLst>
   </p:cSld>
@@ -456,9 +406,9 @@
           <a:bodyPr/>
           <a:lstStyle/>
           <a:p>
-            <a:fld id="{5BCAD085-E8A6-8845-BD4E-CB4CCA059FC4}" type="datetimeFigureOut">
-              <a:rPr lang="en-US" smtClean="0"/>
-              <a:t>1/27/13</a:t>
+            <a:fld id="{A2E06B35-E8FD-4952-9B44-972A066DD42C}" type="datetimeFigureOut">
+              <a:rPr lang="en-US" smtClean="0"/>
+              <a:t>5/14/2018</a:t>
             </a:fld>
             <a:endParaRPr lang="en-US"/>
           </a:p>
@@ -498,7 +448,7 @@
           <a:bodyPr/>
           <a:lstStyle/>
           <a:p>
-            <a:fld id="{C1FF6DA9-008F-8B48-92A6-B652298478BF}" type="slidenum">
+            <a:fld id="{DCFC856B-C097-468E-A17D-914F19584995}" type="slidenum">
               <a:rPr lang="en-US" smtClean="0"/>
               <a:t>‹#›</a:t>
             </a:fld>
@@ -509,7 +459,7 @@
     </p:spTree>
     <p:extLst>
       <p:ext uri="{BB962C8B-B14F-4D97-AF65-F5344CB8AC3E}">
-        <p14:creationId xmlns:p14="http://schemas.microsoft.com/office/powerpoint/2010/main" val="2910927964"/>
+        <p14:creationId xmlns:p14="http://schemas.microsoft.com/office/powerpoint/2010/main" val="127111300"/>
       </p:ext>
     </p:extLst>
   </p:cSld>
@@ -548,8 +498,8 @@
         </p:nvSpPr>
         <p:spPr>
           <a:xfrm>
-            <a:off x="6629400" y="274638"/>
-            <a:ext cx="2057400" cy="5851525"/>
+            <a:off x="8724900" y="365125"/>
+            <a:ext cx="2628900" cy="5811838"/>
           </a:xfrm>
         </p:spPr>
         <p:txBody>
@@ -576,8 +526,8 @@
         </p:nvSpPr>
         <p:spPr>
           <a:xfrm>
-            <a:off x="457200" y="274638"/>
-            <a:ext cx="6019800" cy="5851525"/>
+            <a:off x="838200" y="365125"/>
+            <a:ext cx="7734300" cy="5811838"/>
           </a:xfrm>
         </p:spPr>
         <p:txBody>
@@ -636,9 +586,9 @@
           <a:bodyPr/>
           <a:lstStyle/>
           <a:p>
-            <a:fld id="{5BCAD085-E8A6-8845-BD4E-CB4CCA059FC4}" type="datetimeFigureOut">
-              <a:rPr lang="en-US" smtClean="0"/>
-              <a:t>1/27/13</a:t>
+            <a:fld id="{A2E06B35-E8FD-4952-9B44-972A066DD42C}" type="datetimeFigureOut">
+              <a:rPr lang="en-US" smtClean="0"/>
+              <a:t>5/14/2018</a:t>
             </a:fld>
             <a:endParaRPr lang="en-US"/>
           </a:p>
@@ -678,7 +628,7 @@
           <a:bodyPr/>
           <a:lstStyle/>
           <a:p>
-            <a:fld id="{C1FF6DA9-008F-8B48-92A6-B652298478BF}" type="slidenum">
+            <a:fld id="{DCFC856B-C097-468E-A17D-914F19584995}" type="slidenum">
               <a:rPr lang="en-US" smtClean="0"/>
               <a:t>‹#›</a:t>
             </a:fld>
@@ -689,7 +639,7 @@
     </p:spTree>
     <p:extLst>
       <p:ext uri="{BB962C8B-B14F-4D97-AF65-F5344CB8AC3E}">
-        <p14:creationId xmlns:p14="http://schemas.microsoft.com/office/powerpoint/2010/main" val="3612223792"/>
+        <p14:creationId xmlns:p14="http://schemas.microsoft.com/office/powerpoint/2010/main" val="411475470"/>
       </p:ext>
     </p:extLst>
   </p:cSld>
@@ -806,9 +756,9 @@
           <a:bodyPr/>
           <a:lstStyle/>
           <a:p>
-            <a:fld id="{5BCAD085-E8A6-8845-BD4E-CB4CCA059FC4}" type="datetimeFigureOut">
-              <a:rPr lang="en-US" smtClean="0"/>
-              <a:t>1/27/13</a:t>
+            <a:fld id="{A2E06B35-E8FD-4952-9B44-972A066DD42C}" type="datetimeFigureOut">
+              <a:rPr lang="en-US" smtClean="0"/>
+              <a:t>5/14/2018</a:t>
             </a:fld>
             <a:endParaRPr lang="en-US"/>
           </a:p>
@@ -848,7 +798,7 @@
           <a:bodyPr/>
           <a:lstStyle/>
           <a:p>
-            <a:fld id="{C1FF6DA9-008F-8B48-92A6-B652298478BF}" type="slidenum">
+            <a:fld id="{DCFC856B-C097-468E-A17D-914F19584995}" type="slidenum">
               <a:rPr lang="en-US" smtClean="0"/>
               <a:t>‹#›</a:t>
             </a:fld>
@@ -859,7 +809,7 @@
     </p:spTree>
     <p:extLst>
       <p:ext uri="{BB962C8B-B14F-4D97-AF65-F5344CB8AC3E}">
-        <p14:creationId xmlns:p14="http://schemas.microsoft.com/office/powerpoint/2010/main" val="2614314258"/>
+        <p14:creationId xmlns:p14="http://schemas.microsoft.com/office/powerpoint/2010/main" val="2649431982"/>
       </p:ext>
     </p:extLst>
   </p:cSld>
@@ -898,15 +848,15 @@
         </p:nvSpPr>
         <p:spPr>
           <a:xfrm>
-            <a:off x="722313" y="4406900"/>
-            <a:ext cx="7772400" cy="1362075"/>
+            <a:off x="831850" y="1709738"/>
+            <a:ext cx="10515600" cy="2852737"/>
           </a:xfrm>
         </p:spPr>
         <p:txBody>
-          <a:bodyPr anchor="t"/>
+          <a:bodyPr anchor="b"/>
           <a:lstStyle>
-            <a:lvl1pPr algn="l">
-              <a:defRPr sz="4000" b="1" cap="all"/>
+            <a:lvl1pPr>
+              <a:defRPr sz="6000"/>
             </a:lvl1pPr>
           </a:lstStyle>
           <a:p>
@@ -930,16 +880,16 @@
         </p:nvSpPr>
         <p:spPr>
           <a:xfrm>
-            <a:off x="722313" y="2906713"/>
-            <a:ext cx="7772400" cy="1500187"/>
+            <a:off x="831850" y="4589463"/>
+            <a:ext cx="10515600" cy="1500187"/>
           </a:xfrm>
         </p:spPr>
         <p:txBody>
-          <a:bodyPr anchor="b"/>
+          <a:bodyPr/>
           <a:lstStyle>
             <a:lvl1pPr marL="0" indent="0">
               <a:buNone/>
-              <a:defRPr sz="2000">
+              <a:defRPr sz="2400">
                 <a:solidFill>
                   <a:schemeClr val="tx1">
                     <a:tint val="75000"/>
@@ -949,7 +899,7 @@
             </a:lvl1pPr>
             <a:lvl2pPr marL="457200" indent="0">
               <a:buNone/>
-              <a:defRPr sz="1800">
+              <a:defRPr sz="2000">
                 <a:solidFill>
                   <a:schemeClr val="tx1">
                     <a:tint val="75000"/>
@@ -959,7 +909,7 @@
             </a:lvl2pPr>
             <a:lvl3pPr marL="914400" indent="0">
               <a:buNone/>
-              <a:defRPr sz="1600">
+              <a:defRPr sz="1800">
                 <a:solidFill>
                   <a:schemeClr val="tx1">
                     <a:tint val="75000"/>
@@ -969,7 +919,7 @@
             </a:lvl3pPr>
             <a:lvl4pPr marL="1371600" indent="0">
               <a:buNone/>
-              <a:defRPr sz="1400">
+              <a:defRPr sz="1600">
                 <a:solidFill>
                   <a:schemeClr val="tx1">
                     <a:tint val="75000"/>
@@ -979,7 +929,7 @@
             </a:lvl4pPr>
             <a:lvl5pPr marL="1828800" indent="0">
               <a:buNone/>
-              <a:defRPr sz="1400">
+              <a:defRPr sz="1600">
                 <a:solidFill>
                   <a:schemeClr val="tx1">
                     <a:tint val="75000"/>
@@ -989,7 +939,7 @@
             </a:lvl5pPr>
             <a:lvl6pPr marL="2286000" indent="0">
               <a:buNone/>
-              <a:defRPr sz="1400">
+              <a:defRPr sz="1600">
                 <a:solidFill>
                   <a:schemeClr val="tx1">
                     <a:tint val="75000"/>
@@ -999,7 +949,7 @@
             </a:lvl6pPr>
             <a:lvl7pPr marL="2743200" indent="0">
               <a:buNone/>
-              <a:defRPr sz="1400">
+              <a:defRPr sz="1600">
                 <a:solidFill>
                   <a:schemeClr val="tx1">
                     <a:tint val="75000"/>
@@ -1009,7 +959,7 @@
             </a:lvl7pPr>
             <a:lvl8pPr marL="3200400" indent="0">
               <a:buNone/>
-              <a:defRPr sz="1400">
+              <a:defRPr sz="1600">
                 <a:solidFill>
                   <a:schemeClr val="tx1">
                     <a:tint val="75000"/>
@@ -1019,7 +969,7 @@
             </a:lvl8pPr>
             <a:lvl9pPr marL="3657600" indent="0">
               <a:buNone/>
-              <a:defRPr sz="1400">
+              <a:defRPr sz="1600">
                 <a:solidFill>
                   <a:schemeClr val="tx1">
                     <a:tint val="75000"/>
@@ -1052,9 +1002,9 @@
           <a:bodyPr/>
           <a:lstStyle/>
           <a:p>
-            <a:fld id="{5BCAD085-E8A6-8845-BD4E-CB4CCA059FC4}" type="datetimeFigureOut">
-              <a:rPr lang="en-US" smtClean="0"/>
-              <a:t>1/27/13</a:t>
+            <a:fld id="{A2E06B35-E8FD-4952-9B44-972A066DD42C}" type="datetimeFigureOut">
+              <a:rPr lang="en-US" smtClean="0"/>
+              <a:t>5/14/2018</a:t>
             </a:fld>
             <a:endParaRPr lang="en-US"/>
           </a:p>
@@ -1094,7 +1044,7 @@
           <a:bodyPr/>
           <a:lstStyle/>
           <a:p>
-            <a:fld id="{C1FF6DA9-008F-8B48-92A6-B652298478BF}" type="slidenum">
+            <a:fld id="{DCFC856B-C097-468E-A17D-914F19584995}" type="slidenum">
               <a:rPr lang="en-US" smtClean="0"/>
               <a:t>‹#›</a:t>
             </a:fld>
@@ -1105,7 +1055,7 @@
     </p:spTree>
     <p:extLst>
       <p:ext uri="{BB962C8B-B14F-4D97-AF65-F5344CB8AC3E}">
-        <p14:creationId xmlns:p14="http://schemas.microsoft.com/office/powerpoint/2010/main" val="960648375"/>
+        <p14:creationId xmlns:p14="http://schemas.microsoft.com/office/powerpoint/2010/main" val="1071678417"/>
       </p:ext>
     </p:extLst>
   </p:cSld>
@@ -1167,41 +1117,13 @@
         </p:nvSpPr>
         <p:spPr>
           <a:xfrm>
-            <a:off x="457200" y="1600200"/>
-            <a:ext cx="4038600" cy="4525963"/>
+            <a:off x="838200" y="1825625"/>
+            <a:ext cx="5181600" cy="4351338"/>
           </a:xfrm>
         </p:spPr>
         <p:txBody>
           <a:bodyPr/>
-          <a:lstStyle>
-            <a:lvl1pPr>
-              <a:defRPr sz="2800"/>
-            </a:lvl1pPr>
-            <a:lvl2pPr>
-              <a:defRPr sz="2400"/>
-            </a:lvl2pPr>
-            <a:lvl3pPr>
-              <a:defRPr sz="2000"/>
-            </a:lvl3pPr>
-            <a:lvl4pPr>
-              <a:defRPr sz="1800"/>
-            </a:lvl4pPr>
-            <a:lvl5pPr>
-              <a:defRPr sz="1800"/>
-            </a:lvl5pPr>
-            <a:lvl6pPr>
-              <a:defRPr sz="1800"/>
-            </a:lvl6pPr>
-            <a:lvl7pPr>
-              <a:defRPr sz="1800"/>
-            </a:lvl7pPr>
-            <a:lvl8pPr>
-              <a:defRPr sz="1800"/>
-            </a:lvl8pPr>
-            <a:lvl9pPr>
-              <a:defRPr sz="1800"/>
-            </a:lvl9pPr>
-          </a:lstStyle>
+          <a:lstStyle/>
           <a:p>
             <a:pPr lvl="0"/>
             <a:r>
@@ -1252,41 +1174,13 @@
         </p:nvSpPr>
         <p:spPr>
           <a:xfrm>
-            <a:off x="4648200" y="1600200"/>
-            <a:ext cx="4038600" cy="4525963"/>
+            <a:off x="6172200" y="1825625"/>
+            <a:ext cx="5181600" cy="4351338"/>
           </a:xfrm>
         </p:spPr>
         <p:txBody>
           <a:bodyPr/>
-          <a:lstStyle>
-            <a:lvl1pPr>
-              <a:defRPr sz="2800"/>
-            </a:lvl1pPr>
-            <a:lvl2pPr>
-              <a:defRPr sz="2400"/>
-            </a:lvl2pPr>
-            <a:lvl3pPr>
-              <a:defRPr sz="2000"/>
-            </a:lvl3pPr>
-            <a:lvl4pPr>
-              <a:defRPr sz="1800"/>
-            </a:lvl4pPr>
-            <a:lvl5pPr>
-              <a:defRPr sz="1800"/>
-            </a:lvl5pPr>
-            <a:lvl6pPr>
-              <a:defRPr sz="1800"/>
-            </a:lvl6pPr>
-            <a:lvl7pPr>
-              <a:defRPr sz="1800"/>
-            </a:lvl7pPr>
-            <a:lvl8pPr>
-              <a:defRPr sz="1800"/>
-            </a:lvl8pPr>
-            <a:lvl9pPr>
-              <a:defRPr sz="1800"/>
-            </a:lvl9pPr>
-          </a:lstStyle>
+          <a:lstStyle/>
           <a:p>
             <a:pPr lvl="0"/>
             <a:r>
@@ -1340,9 +1234,9 @@
           <a:bodyPr/>
           <a:lstStyle/>
           <a:p>
-            <a:fld id="{5BCAD085-E8A6-8845-BD4E-CB4CCA059FC4}" type="datetimeFigureOut">
-              <a:rPr lang="en-US" smtClean="0"/>
-              <a:t>1/27/13</a:t>
+            <a:fld id="{A2E06B35-E8FD-4952-9B44-972A066DD42C}" type="datetimeFigureOut">
+              <a:rPr lang="en-US" smtClean="0"/>
+              <a:t>5/14/2018</a:t>
             </a:fld>
             <a:endParaRPr lang="en-US"/>
           </a:p>
@@ -1382,7 +1276,7 @@
           <a:bodyPr/>
           <a:lstStyle/>
           <a:p>
-            <a:fld id="{C1FF6DA9-008F-8B48-92A6-B652298478BF}" type="slidenum">
+            <a:fld id="{DCFC856B-C097-468E-A17D-914F19584995}" type="slidenum">
               <a:rPr lang="en-US" smtClean="0"/>
               <a:t>‹#›</a:t>
             </a:fld>
@@ -1393,7 +1287,7 @@
     </p:spTree>
     <p:extLst>
       <p:ext uri="{BB962C8B-B14F-4D97-AF65-F5344CB8AC3E}">
-        <p14:creationId xmlns:p14="http://schemas.microsoft.com/office/powerpoint/2010/main" val="2782244947"/>
+        <p14:creationId xmlns:p14="http://schemas.microsoft.com/office/powerpoint/2010/main" val="858339210"/>
       </p:ext>
     </p:extLst>
   </p:cSld>
@@ -1430,37 +1324,38 @@
             <p:ph type="title"/>
           </p:nvPr>
         </p:nvSpPr>
-        <p:spPr/>
-        <p:txBody>
-          <a:bodyPr/>
-          <a:lstStyle>
-            <a:lvl1pPr>
-              <a:defRPr/>
-            </a:lvl1pPr>
-          </a:lstStyle>
-          <a:p>
-            <a:r>
-              <a:rPr lang="en-US" smtClean="0"/>
-              <a:t>Click to edit Master title style</a:t>
-            </a:r>
-            <a:endParaRPr lang="en-US"/>
-          </a:p>
-        </p:txBody>
-      </p:sp>
-      <p:sp>
-        <p:nvSpPr>
-          <p:cNvPr id="3" name="Text Placeholder 2"/>
-          <p:cNvSpPr>
-            <a:spLocks noGrp="1"/>
-          </p:cNvSpPr>
-          <p:nvPr>
-            <p:ph type="body" idx="1"/>
-          </p:nvPr>
-        </p:nvSpPr>
         <p:spPr>
           <a:xfrm>
-            <a:off x="457200" y="1535113"/>
-            <a:ext cx="4040188" cy="639762"/>
+            <a:off x="839788" y="365125"/>
+            <a:ext cx="10515600" cy="1325563"/>
+          </a:xfrm>
+        </p:spPr>
+        <p:txBody>
+          <a:bodyPr/>
+          <a:lstStyle/>
+          <a:p>
+            <a:r>
+              <a:rPr lang="en-US" smtClean="0"/>
+              <a:t>Click to edit Master title style</a:t>
+            </a:r>
+            <a:endParaRPr lang="en-US"/>
+          </a:p>
+        </p:txBody>
+      </p:sp>
+      <p:sp>
+        <p:nvSpPr>
+          <p:cNvPr id="3" name="Text Placeholder 2"/>
+          <p:cNvSpPr>
+            <a:spLocks noGrp="1"/>
+          </p:cNvSpPr>
+          <p:nvPr>
+            <p:ph type="body" idx="1"/>
+          </p:nvPr>
+        </p:nvSpPr>
+        <p:spPr>
+          <a:xfrm>
+            <a:off x="839788" y="1681163"/>
+            <a:ext cx="5157787" cy="823912"/>
           </a:xfrm>
         </p:spPr>
         <p:txBody>
@@ -1524,41 +1419,13 @@
         </p:nvSpPr>
         <p:spPr>
           <a:xfrm>
-            <a:off x="457200" y="2174875"/>
-            <a:ext cx="4040188" cy="3951288"/>
+            <a:off x="839788" y="2505075"/>
+            <a:ext cx="5157787" cy="3684588"/>
           </a:xfrm>
         </p:spPr>
         <p:txBody>
           <a:bodyPr/>
-          <a:lstStyle>
-            <a:lvl1pPr>
-              <a:defRPr sz="2400"/>
-            </a:lvl1pPr>
-            <a:lvl2pPr>
-              <a:defRPr sz="2000"/>
-            </a:lvl2pPr>
-            <a:lvl3pPr>
-              <a:defRPr sz="1800"/>
-            </a:lvl3pPr>
-            <a:lvl4pPr>
-              <a:defRPr sz="1600"/>
-            </a:lvl4pPr>
-            <a:lvl5pPr>
-              <a:defRPr sz="1600"/>
-            </a:lvl5pPr>
-            <a:lvl6pPr>
-              <a:defRPr sz="1600"/>
-            </a:lvl6pPr>
-            <a:lvl7pPr>
-              <a:defRPr sz="1600"/>
-            </a:lvl7pPr>
-            <a:lvl8pPr>
-              <a:defRPr sz="1600"/>
-            </a:lvl8pPr>
-            <a:lvl9pPr>
-              <a:defRPr sz="1600"/>
-            </a:lvl9pPr>
-          </a:lstStyle>
+          <a:lstStyle/>
           <a:p>
             <a:pPr lvl="0"/>
             <a:r>
@@ -1609,8 +1476,8 @@
         </p:nvSpPr>
         <p:spPr>
           <a:xfrm>
-            <a:off x="4645025" y="1535113"/>
-            <a:ext cx="4041775" cy="639762"/>
+            <a:off x="6172200" y="1681163"/>
+            <a:ext cx="5183188" cy="823912"/>
           </a:xfrm>
         </p:spPr>
         <p:txBody>
@@ -1674,41 +1541,13 @@
         </p:nvSpPr>
         <p:spPr>
           <a:xfrm>
-            <a:off x="4645025" y="2174875"/>
-            <a:ext cx="4041775" cy="3951288"/>
+            <a:off x="6172200" y="2505075"/>
+            <a:ext cx="5183188" cy="3684588"/>
           </a:xfrm>
         </p:spPr>
         <p:txBody>
           <a:bodyPr/>
-          <a:lstStyle>
-            <a:lvl1pPr>
-              <a:defRPr sz="2400"/>
-            </a:lvl1pPr>
-            <a:lvl2pPr>
-              <a:defRPr sz="2000"/>
-            </a:lvl2pPr>
-            <a:lvl3pPr>
-              <a:defRPr sz="1800"/>
-            </a:lvl3pPr>
-            <a:lvl4pPr>
-              <a:defRPr sz="1600"/>
-            </a:lvl4pPr>
-            <a:lvl5pPr>
-              <a:defRPr sz="1600"/>
-            </a:lvl5pPr>
-            <a:lvl6pPr>
-              <a:defRPr sz="1600"/>
-            </a:lvl6pPr>
-            <a:lvl7pPr>
-              <a:defRPr sz="1600"/>
-            </a:lvl7pPr>
-            <a:lvl8pPr>
-              <a:defRPr sz="1600"/>
-            </a:lvl8pPr>
-            <a:lvl9pPr>
-              <a:defRPr sz="1600"/>
-            </a:lvl9pPr>
-          </a:lstStyle>
+          <a:lstStyle/>
           <a:p>
             <a:pPr lvl="0"/>
             <a:r>
@@ -1762,9 +1601,9 @@
           <a:bodyPr/>
           <a:lstStyle/>
           <a:p>
-            <a:fld id="{5BCAD085-E8A6-8845-BD4E-CB4CCA059FC4}" type="datetimeFigureOut">
-              <a:rPr lang="en-US" smtClean="0"/>
-              <a:t>1/27/13</a:t>
+            <a:fld id="{A2E06B35-E8FD-4952-9B44-972A066DD42C}" type="datetimeFigureOut">
+              <a:rPr lang="en-US" smtClean="0"/>
+              <a:t>5/14/2018</a:t>
             </a:fld>
             <a:endParaRPr lang="en-US"/>
           </a:p>
@@ -1804,7 +1643,7 @@
           <a:bodyPr/>
           <a:lstStyle/>
           <a:p>
-            <a:fld id="{C1FF6DA9-008F-8B48-92A6-B652298478BF}" type="slidenum">
+            <a:fld id="{DCFC856B-C097-468E-A17D-914F19584995}" type="slidenum">
               <a:rPr lang="en-US" smtClean="0"/>
               <a:t>‹#›</a:t>
             </a:fld>
@@ -1815,7 +1654,7 @@
     </p:spTree>
     <p:extLst>
       <p:ext uri="{BB962C8B-B14F-4D97-AF65-F5344CB8AC3E}">
-        <p14:creationId xmlns:p14="http://schemas.microsoft.com/office/powerpoint/2010/main" val="990158736"/>
+        <p14:creationId xmlns:p14="http://schemas.microsoft.com/office/powerpoint/2010/main" val="3651782523"/>
       </p:ext>
     </p:extLst>
   </p:cSld>
@@ -1880,9 +1719,9 @@
           <a:bodyPr/>
           <a:lstStyle/>
           <a:p>
-            <a:fld id="{5BCAD085-E8A6-8845-BD4E-CB4CCA059FC4}" type="datetimeFigureOut">
-              <a:rPr lang="en-US" smtClean="0"/>
-              <a:t>1/27/13</a:t>
+            <a:fld id="{A2E06B35-E8FD-4952-9B44-972A066DD42C}" type="datetimeFigureOut">
+              <a:rPr lang="en-US" smtClean="0"/>
+              <a:t>5/14/2018</a:t>
             </a:fld>
             <a:endParaRPr lang="en-US"/>
           </a:p>
@@ -1922,7 +1761,7 @@
           <a:bodyPr/>
           <a:lstStyle/>
           <a:p>
-            <a:fld id="{C1FF6DA9-008F-8B48-92A6-B652298478BF}" type="slidenum">
+            <a:fld id="{DCFC856B-C097-468E-A17D-914F19584995}" type="slidenum">
               <a:rPr lang="en-US" smtClean="0"/>
               <a:t>‹#›</a:t>
             </a:fld>
@@ -1933,7 +1772,7 @@
     </p:spTree>
     <p:extLst>
       <p:ext uri="{BB962C8B-B14F-4D97-AF65-F5344CB8AC3E}">
-        <p14:creationId xmlns:p14="http://schemas.microsoft.com/office/powerpoint/2010/main" val="727027711"/>
+        <p14:creationId xmlns:p14="http://schemas.microsoft.com/office/powerpoint/2010/main" val="4107394286"/>
       </p:ext>
     </p:extLst>
   </p:cSld>
@@ -1975,9 +1814,9 @@
           <a:bodyPr/>
           <a:lstStyle/>
           <a:p>
-            <a:fld id="{5BCAD085-E8A6-8845-BD4E-CB4CCA059FC4}" type="datetimeFigureOut">
-              <a:rPr lang="en-US" smtClean="0"/>
-              <a:t>1/27/13</a:t>
+            <a:fld id="{A2E06B35-E8FD-4952-9B44-972A066DD42C}" type="datetimeFigureOut">
+              <a:rPr lang="en-US" smtClean="0"/>
+              <a:t>5/14/2018</a:t>
             </a:fld>
             <a:endParaRPr lang="en-US"/>
           </a:p>
@@ -2017,7 +1856,7 @@
           <a:bodyPr/>
           <a:lstStyle/>
           <a:p>
-            <a:fld id="{C1FF6DA9-008F-8B48-92A6-B652298478BF}" type="slidenum">
+            <a:fld id="{DCFC856B-C097-468E-A17D-914F19584995}" type="slidenum">
               <a:rPr lang="en-US" smtClean="0"/>
               <a:t>‹#›</a:t>
             </a:fld>
@@ -2028,7 +1867,7 @@
     </p:spTree>
     <p:extLst>
       <p:ext uri="{BB962C8B-B14F-4D97-AF65-F5344CB8AC3E}">
-        <p14:creationId xmlns:p14="http://schemas.microsoft.com/office/powerpoint/2010/main" val="1212999818"/>
+        <p14:creationId xmlns:p14="http://schemas.microsoft.com/office/powerpoint/2010/main" val="2956467470"/>
       </p:ext>
     </p:extLst>
   </p:cSld>
@@ -2067,15 +1906,15 @@
         </p:nvSpPr>
         <p:spPr>
           <a:xfrm>
-            <a:off x="457200" y="273050"/>
-            <a:ext cx="3008313" cy="1162050"/>
+            <a:off x="839788" y="457200"/>
+            <a:ext cx="3932237" cy="1600200"/>
           </a:xfrm>
         </p:spPr>
         <p:txBody>
           <a:bodyPr anchor="b"/>
           <a:lstStyle>
-            <a:lvl1pPr algn="l">
-              <a:defRPr sz="2000" b="1"/>
+            <a:lvl1pPr>
+              <a:defRPr sz="3200"/>
             </a:lvl1pPr>
           </a:lstStyle>
           <a:p>
@@ -2099,8 +1938,8 @@
         </p:nvSpPr>
         <p:spPr>
           <a:xfrm>
-            <a:off x="3575050" y="273050"/>
-            <a:ext cx="5111750" cy="5853113"/>
+            <a:off x="5183188" y="987425"/>
+            <a:ext cx="6172200" cy="4873625"/>
           </a:xfrm>
         </p:spPr>
         <p:txBody>
@@ -2184,8 +2023,8 @@
         </p:nvSpPr>
         <p:spPr>
           <a:xfrm>
-            <a:off x="457200" y="1435100"/>
-            <a:ext cx="3008313" cy="4691063"/>
+            <a:off x="839788" y="2057400"/>
+            <a:ext cx="3932237" cy="3811588"/>
           </a:xfrm>
         </p:spPr>
         <p:txBody>
@@ -2193,39 +2032,39 @@
           <a:lstStyle>
             <a:lvl1pPr marL="0" indent="0">
               <a:buNone/>
-              <a:defRPr sz="1400"/>
+              <a:defRPr sz="1600"/>
             </a:lvl1pPr>
             <a:lvl2pPr marL="457200" indent="0">
               <a:buNone/>
-              <a:defRPr sz="1200"/>
+              <a:defRPr sz="1400"/>
             </a:lvl2pPr>
             <a:lvl3pPr marL="914400" indent="0">
               <a:buNone/>
-              <a:defRPr sz="1000"/>
+              <a:defRPr sz="1200"/>
             </a:lvl3pPr>
             <a:lvl4pPr marL="1371600" indent="0">
               <a:buNone/>
-              <a:defRPr sz="900"/>
+              <a:defRPr sz="1000"/>
             </a:lvl4pPr>
             <a:lvl5pPr marL="1828800" indent="0">
               <a:buNone/>
-              <a:defRPr sz="900"/>
+              <a:defRPr sz="1000"/>
             </a:lvl5pPr>
             <a:lvl6pPr marL="2286000" indent="0">
               <a:buNone/>
-              <a:defRPr sz="900"/>
+              <a:defRPr sz="1000"/>
             </a:lvl6pPr>
             <a:lvl7pPr marL="2743200" indent="0">
               <a:buNone/>
-              <a:defRPr sz="900"/>
+              <a:defRPr sz="1000"/>
             </a:lvl7pPr>
             <a:lvl8pPr marL="3200400" indent="0">
               <a:buNone/>
-              <a:defRPr sz="900"/>
+              <a:defRPr sz="1000"/>
             </a:lvl8pPr>
             <a:lvl9pPr marL="3657600" indent="0">
               <a:buNone/>
-              <a:defRPr sz="900"/>
+              <a:defRPr sz="1000"/>
             </a:lvl9pPr>
           </a:lstStyle>
           <a:p>
@@ -2252,9 +2091,9 @@
           <a:bodyPr/>
           <a:lstStyle/>
           <a:p>
-            <a:fld id="{5BCAD085-E8A6-8845-BD4E-CB4CCA059FC4}" type="datetimeFigureOut">
-              <a:rPr lang="en-US" smtClean="0"/>
-              <a:t>1/27/13</a:t>
+            <a:fld id="{A2E06B35-E8FD-4952-9B44-972A066DD42C}" type="datetimeFigureOut">
+              <a:rPr lang="en-US" smtClean="0"/>
+              <a:t>5/14/2018</a:t>
             </a:fld>
             <a:endParaRPr lang="en-US"/>
           </a:p>
@@ -2294,7 +2133,7 @@
           <a:bodyPr/>
           <a:lstStyle/>
           <a:p>
-            <a:fld id="{C1FF6DA9-008F-8B48-92A6-B652298478BF}" type="slidenum">
+            <a:fld id="{DCFC856B-C097-468E-A17D-914F19584995}" type="slidenum">
               <a:rPr lang="en-US" smtClean="0"/>
               <a:t>‹#›</a:t>
             </a:fld>
@@ -2305,7 +2144,7 @@
     </p:spTree>
     <p:extLst>
       <p:ext uri="{BB962C8B-B14F-4D97-AF65-F5344CB8AC3E}">
-        <p14:creationId xmlns:p14="http://schemas.microsoft.com/office/powerpoint/2010/main" val="1840726560"/>
+        <p14:creationId xmlns:p14="http://schemas.microsoft.com/office/powerpoint/2010/main" val="2798089016"/>
       </p:ext>
     </p:extLst>
   </p:cSld>
@@ -2344,15 +2183,15 @@
         </p:nvSpPr>
         <p:spPr>
           <a:xfrm>
-            <a:off x="1792288" y="4800600"/>
-            <a:ext cx="5486400" cy="566738"/>
+            <a:off x="839788" y="457200"/>
+            <a:ext cx="3932237" cy="1600200"/>
           </a:xfrm>
         </p:spPr>
         <p:txBody>
           <a:bodyPr anchor="b"/>
           <a:lstStyle>
-            <a:lvl1pPr algn="l">
-              <a:defRPr sz="2000" b="1"/>
+            <a:lvl1pPr>
+              <a:defRPr sz="3200"/>
             </a:lvl1pPr>
           </a:lstStyle>
           <a:p>
@@ -2376,8 +2215,8 @@
         </p:nvSpPr>
         <p:spPr>
           <a:xfrm>
-            <a:off x="1792288" y="612775"/>
-            <a:ext cx="5486400" cy="4114800"/>
+            <a:off x="5183188" y="987425"/>
+            <a:ext cx="6172200" cy="4873625"/>
           </a:xfrm>
         </p:spPr>
         <p:txBody>
@@ -2437,8 +2276,8 @@
         </p:nvSpPr>
         <p:spPr>
           <a:xfrm>
-            <a:off x="1792288" y="5367338"/>
-            <a:ext cx="5486400" cy="804862"/>
+            <a:off x="839788" y="2057400"/>
+            <a:ext cx="3932237" cy="3811588"/>
           </a:xfrm>
         </p:spPr>
         <p:txBody>
@@ -2446,39 +2285,39 @@
           <a:lstStyle>
             <a:lvl1pPr marL="0" indent="0">
               <a:buNone/>
-              <a:defRPr sz="1400"/>
+              <a:defRPr sz="1600"/>
             </a:lvl1pPr>
             <a:lvl2pPr marL="457200" indent="0">
               <a:buNone/>
-              <a:defRPr sz="1200"/>
+              <a:defRPr sz="1400"/>
             </a:lvl2pPr>
             <a:lvl3pPr marL="914400" indent="0">
               <a:buNone/>
-              <a:defRPr sz="1000"/>
+              <a:defRPr sz="1200"/>
             </a:lvl3pPr>
             <a:lvl4pPr marL="1371600" indent="0">
               <a:buNone/>
-              <a:defRPr sz="900"/>
+              <a:defRPr sz="1000"/>
             </a:lvl4pPr>
             <a:lvl5pPr marL="1828800" indent="0">
               <a:buNone/>
-              <a:defRPr sz="900"/>
+              <a:defRPr sz="1000"/>
             </a:lvl5pPr>
             <a:lvl6pPr marL="2286000" indent="0">
               <a:buNone/>
-              <a:defRPr sz="900"/>
+              <a:defRPr sz="1000"/>
             </a:lvl6pPr>
             <a:lvl7pPr marL="2743200" indent="0">
               <a:buNone/>
-              <a:defRPr sz="900"/>
+              <a:defRPr sz="1000"/>
             </a:lvl7pPr>
             <a:lvl8pPr marL="3200400" indent="0">
               <a:buNone/>
-              <a:defRPr sz="900"/>
+              <a:defRPr sz="1000"/>
             </a:lvl8pPr>
             <a:lvl9pPr marL="3657600" indent="0">
               <a:buNone/>
-              <a:defRPr sz="900"/>
+              <a:defRPr sz="1000"/>
             </a:lvl9pPr>
           </a:lstStyle>
           <a:p>
@@ -2505,9 +2344,9 @@
           <a:bodyPr/>
           <a:lstStyle/>
           <a:p>
-            <a:fld id="{5BCAD085-E8A6-8845-BD4E-CB4CCA059FC4}" type="datetimeFigureOut">
-              <a:rPr lang="en-US" smtClean="0"/>
-              <a:t>1/27/13</a:t>
+            <a:fld id="{A2E06B35-E8FD-4952-9B44-972A066DD42C}" type="datetimeFigureOut">
+              <a:rPr lang="en-US" smtClean="0"/>
+              <a:t>5/14/2018</a:t>
             </a:fld>
             <a:endParaRPr lang="en-US"/>
           </a:p>
@@ -2547,7 +2386,7 @@
           <a:bodyPr/>
           <a:lstStyle/>
           <a:p>
-            <a:fld id="{C1FF6DA9-008F-8B48-92A6-B652298478BF}" type="slidenum">
+            <a:fld id="{DCFC856B-C097-468E-A17D-914F19584995}" type="slidenum">
               <a:rPr lang="en-US" smtClean="0"/>
               <a:t>‹#›</a:t>
             </a:fld>
@@ -2558,7 +2397,7 @@
     </p:spTree>
     <p:extLst>
       <p:ext uri="{BB962C8B-B14F-4D97-AF65-F5344CB8AC3E}">
-        <p14:creationId xmlns:p14="http://schemas.microsoft.com/office/powerpoint/2010/main" val="3889236939"/>
+        <p14:creationId xmlns:p14="http://schemas.microsoft.com/office/powerpoint/2010/main" val="2275630563"/>
       </p:ext>
     </p:extLst>
   </p:cSld>
@@ -2602,8 +2441,8 @@
         </p:nvSpPr>
         <p:spPr>
           <a:xfrm>
-            <a:off x="457200" y="274638"/>
-            <a:ext cx="8229600" cy="1143000"/>
+            <a:off x="838200" y="365125"/>
+            <a:ext cx="10515600" cy="1325563"/>
           </a:xfrm>
           <a:prstGeom prst="rect">
             <a:avLst/>
@@ -2635,8 +2474,8 @@
         </p:nvSpPr>
         <p:spPr>
           <a:xfrm>
-            <a:off x="457200" y="1600200"/>
-            <a:ext cx="8229600" cy="4525963"/>
+            <a:off x="838200" y="1825625"/>
+            <a:ext cx="10515600" cy="4351338"/>
           </a:xfrm>
           <a:prstGeom prst="rect">
             <a:avLst/>
@@ -2697,8 +2536,8 @@
         </p:nvSpPr>
         <p:spPr>
           <a:xfrm>
-            <a:off x="457200" y="6356350"/>
-            <a:ext cx="2133600" cy="365125"/>
+            <a:off x="838200" y="6356350"/>
+            <a:ext cx="2743200" cy="365125"/>
           </a:xfrm>
           <a:prstGeom prst="rect">
             <a:avLst/>
@@ -2718,9 +2557,9 @@
             </a:lvl1pPr>
           </a:lstStyle>
           <a:p>
-            <a:fld id="{5BCAD085-E8A6-8845-BD4E-CB4CCA059FC4}" type="datetimeFigureOut">
-              <a:rPr lang="en-US" smtClean="0"/>
-              <a:t>1/27/13</a:t>
+            <a:fld id="{A2E06B35-E8FD-4952-9B44-972A066DD42C}" type="datetimeFigureOut">
+              <a:rPr lang="en-US" smtClean="0"/>
+              <a:t>5/14/2018</a:t>
             </a:fld>
             <a:endParaRPr lang="en-US"/>
           </a:p>
@@ -2738,8 +2577,8 @@
         </p:nvSpPr>
         <p:spPr>
           <a:xfrm>
-            <a:off x="3124200" y="6356350"/>
-            <a:ext cx="2895600" cy="365125"/>
+            <a:off x="4038600" y="6356350"/>
+            <a:ext cx="4114800" cy="365125"/>
           </a:xfrm>
           <a:prstGeom prst="rect">
             <a:avLst/>
@@ -2775,8 +2614,8 @@
         </p:nvSpPr>
         <p:spPr>
           <a:xfrm>
-            <a:off x="6553200" y="6356350"/>
-            <a:ext cx="2133600" cy="365125"/>
+            <a:off x="8610600" y="6356350"/>
+            <a:ext cx="2743200" cy="365125"/>
           </a:xfrm>
           <a:prstGeom prst="rect">
             <a:avLst/>
@@ -2796,7 +2635,7 @@
             </a:lvl1pPr>
           </a:lstStyle>
           <a:p>
-            <a:fld id="{C1FF6DA9-008F-8B48-92A6-B652298478BF}" type="slidenum">
+            <a:fld id="{DCFC856B-C097-468E-A17D-914F19584995}" type="slidenum">
               <a:rPr lang="en-US" smtClean="0"/>
               <a:t>‹#›</a:t>
             </a:fld>
@@ -2807,7 +2646,7 @@
     </p:spTree>
     <p:extLst>
       <p:ext uri="{BB962C8B-B14F-4D97-AF65-F5344CB8AC3E}">
-        <p14:creationId xmlns:p14="http://schemas.microsoft.com/office/powerpoint/2010/main" val="2209977519"/>
+        <p14:creationId xmlns:p14="http://schemas.microsoft.com/office/powerpoint/2010/main" val="2470433152"/>
       </p:ext>
     </p:extLst>
   </p:cSld>
@@ -2827,7 +2666,10 @@
   </p:sldLayoutIdLst>
   <p:txStyles>
     <p:titleStyle>
-      <a:lvl1pPr algn="ctr" defTabSz="457200" rtl="0" eaLnBrk="1" latinLnBrk="0" hangingPunct="1">
+      <a:lvl1pPr algn="l" defTabSz="914400" rtl="0" eaLnBrk="1" latinLnBrk="0" hangingPunct="1">
+        <a:lnSpc>
+          <a:spcPct val="90000"/>
+        </a:lnSpc>
         <a:spcBef>
           <a:spcPct val="0"/>
         </a:spcBef>
@@ -2843,13 +2685,16 @@
       </a:lvl1pPr>
     </p:titleStyle>
     <p:bodyStyle>
-      <a:lvl1pPr marL="342900" indent="-342900" algn="l" defTabSz="457200" rtl="0" eaLnBrk="1" latinLnBrk="0" hangingPunct="1">
+      <a:lvl1pPr marL="228600" indent="-228600" algn="l" defTabSz="914400" rtl="0" eaLnBrk="1" latinLnBrk="0" hangingPunct="1">
+        <a:lnSpc>
+          <a:spcPct val="90000"/>
+        </a:lnSpc>
         <a:spcBef>
-          <a:spcPct val="20000"/>
+          <a:spcPts val="1000"/>
         </a:spcBef>
-        <a:buFont typeface="Arial"/>
+        <a:buFont typeface="Arial" panose="020B0604020202020204" pitchFamily="34" charset="0"/>
         <a:buChar char="•"/>
-        <a:defRPr sz="3200" kern="1200">
+        <a:defRPr sz="2800" kern="1200">
           <a:solidFill>
             <a:schemeClr val="tx1"/>
           </a:solidFill>
@@ -2858,26 +2703,14 @@
           <a:cs typeface="+mn-cs"/>
         </a:defRPr>
       </a:lvl1pPr>
-      <a:lvl2pPr marL="742950" indent="-285750" algn="l" defTabSz="457200" rtl="0" eaLnBrk="1" latinLnBrk="0" hangingPunct="1">
+      <a:lvl2pPr marL="685800" indent="-228600" algn="l" defTabSz="914400" rtl="0" eaLnBrk="1" latinLnBrk="0" hangingPunct="1">
+        <a:lnSpc>
+          <a:spcPct val="90000"/>
+        </a:lnSpc>
         <a:spcBef>
-          <a:spcPct val="20000"/>
+          <a:spcPts val="500"/>
         </a:spcBef>
-        <a:buFont typeface="Arial"/>
-        <a:buChar char="–"/>
-        <a:defRPr sz="2800" kern="1200">
-          <a:solidFill>
-            <a:schemeClr val="tx1"/>
-          </a:solidFill>
-          <a:latin typeface="+mn-lt"/>
-          <a:ea typeface="+mn-ea"/>
-          <a:cs typeface="+mn-cs"/>
-        </a:defRPr>
-      </a:lvl2pPr>
-      <a:lvl3pPr marL="1143000" indent="-228600" algn="l" defTabSz="457200" rtl="0" eaLnBrk="1" latinLnBrk="0" hangingPunct="1">
-        <a:spcBef>
-          <a:spcPct val="20000"/>
-        </a:spcBef>
-        <a:buFont typeface="Arial"/>
+        <a:buFont typeface="Arial" panose="020B0604020202020204" pitchFamily="34" charset="0"/>
         <a:buChar char="•"/>
         <a:defRPr sz="2400" kern="1200">
           <a:solidFill>
@@ -2887,42 +2720,15 @@
           <a:ea typeface="+mn-ea"/>
           <a:cs typeface="+mn-cs"/>
         </a:defRPr>
-      </a:lvl3pPr>
-      <a:lvl4pPr marL="1600200" indent="-228600" algn="l" defTabSz="457200" rtl="0" eaLnBrk="1" latinLnBrk="0" hangingPunct="1">
+      </a:lvl2pPr>
+      <a:lvl3pPr marL="1143000" indent="-228600" algn="l" defTabSz="914400" rtl="0" eaLnBrk="1" latinLnBrk="0" hangingPunct="1">
+        <a:lnSpc>
+          <a:spcPct val="90000"/>
+        </a:lnSpc>
         <a:spcBef>
-          <a:spcPct val="20000"/>
+          <a:spcPts val="500"/>
         </a:spcBef>
-        <a:buFont typeface="Arial"/>
-        <a:buChar char="–"/>
-        <a:defRPr sz="2000" kern="1200">
-          <a:solidFill>
-            <a:schemeClr val="tx1"/>
-          </a:solidFill>
-          <a:latin typeface="+mn-lt"/>
-          <a:ea typeface="+mn-ea"/>
-          <a:cs typeface="+mn-cs"/>
-        </a:defRPr>
-      </a:lvl4pPr>
-      <a:lvl5pPr marL="2057400" indent="-228600" algn="l" defTabSz="457200" rtl="0" eaLnBrk="1" latinLnBrk="0" hangingPunct="1">
-        <a:spcBef>
-          <a:spcPct val="20000"/>
-        </a:spcBef>
-        <a:buFont typeface="Arial"/>
-        <a:buChar char="»"/>
-        <a:defRPr sz="2000" kern="1200">
-          <a:solidFill>
-            <a:schemeClr val="tx1"/>
-          </a:solidFill>
-          <a:latin typeface="+mn-lt"/>
-          <a:ea typeface="+mn-ea"/>
-          <a:cs typeface="+mn-cs"/>
-        </a:defRPr>
-      </a:lvl5pPr>
-      <a:lvl6pPr marL="2514600" indent="-228600" algn="l" defTabSz="457200" rtl="0" eaLnBrk="1" latinLnBrk="0" hangingPunct="1">
-        <a:spcBef>
-          <a:spcPct val="20000"/>
-        </a:spcBef>
-        <a:buFont typeface="Arial"/>
+        <a:buFont typeface="Arial" panose="020B0604020202020204" pitchFamily="34" charset="0"/>
         <a:buChar char="•"/>
         <a:defRPr sz="2000" kern="1200">
           <a:solidFill>
@@ -2932,14 +2738,71 @@
           <a:ea typeface="+mn-ea"/>
           <a:cs typeface="+mn-cs"/>
         </a:defRPr>
+      </a:lvl3pPr>
+      <a:lvl4pPr marL="1600200" indent="-228600" algn="l" defTabSz="914400" rtl="0" eaLnBrk="1" latinLnBrk="0" hangingPunct="1">
+        <a:lnSpc>
+          <a:spcPct val="90000"/>
+        </a:lnSpc>
+        <a:spcBef>
+          <a:spcPts val="500"/>
+        </a:spcBef>
+        <a:buFont typeface="Arial" panose="020B0604020202020204" pitchFamily="34" charset="0"/>
+        <a:buChar char="•"/>
+        <a:defRPr sz="1800" kern="1200">
+          <a:solidFill>
+            <a:schemeClr val="tx1"/>
+          </a:solidFill>
+          <a:latin typeface="+mn-lt"/>
+          <a:ea typeface="+mn-ea"/>
+          <a:cs typeface="+mn-cs"/>
+        </a:defRPr>
+      </a:lvl4pPr>
+      <a:lvl5pPr marL="2057400" indent="-228600" algn="l" defTabSz="914400" rtl="0" eaLnBrk="1" latinLnBrk="0" hangingPunct="1">
+        <a:lnSpc>
+          <a:spcPct val="90000"/>
+        </a:lnSpc>
+        <a:spcBef>
+          <a:spcPts val="500"/>
+        </a:spcBef>
+        <a:buFont typeface="Arial" panose="020B0604020202020204" pitchFamily="34" charset="0"/>
+        <a:buChar char="•"/>
+        <a:defRPr sz="1800" kern="1200">
+          <a:solidFill>
+            <a:schemeClr val="tx1"/>
+          </a:solidFill>
+          <a:latin typeface="+mn-lt"/>
+          <a:ea typeface="+mn-ea"/>
+          <a:cs typeface="+mn-cs"/>
+        </a:defRPr>
+      </a:lvl5pPr>
+      <a:lvl6pPr marL="2514600" indent="-228600" algn="l" defTabSz="914400" rtl="0" eaLnBrk="1" latinLnBrk="0" hangingPunct="1">
+        <a:lnSpc>
+          <a:spcPct val="90000"/>
+        </a:lnSpc>
+        <a:spcBef>
+          <a:spcPts val="500"/>
+        </a:spcBef>
+        <a:buFont typeface="Arial" panose="020B0604020202020204" pitchFamily="34" charset="0"/>
+        <a:buChar char="•"/>
+        <a:defRPr sz="1800" kern="1200">
+          <a:solidFill>
+            <a:schemeClr val="tx1"/>
+          </a:solidFill>
+          <a:latin typeface="+mn-lt"/>
+          <a:ea typeface="+mn-ea"/>
+          <a:cs typeface="+mn-cs"/>
+        </a:defRPr>
       </a:lvl6pPr>
-      <a:lvl7pPr marL="2971800" indent="-228600" algn="l" defTabSz="457200" rtl="0" eaLnBrk="1" latinLnBrk="0" hangingPunct="1">
+      <a:lvl7pPr marL="2971800" indent="-228600" algn="l" defTabSz="914400" rtl="0" eaLnBrk="1" latinLnBrk="0" hangingPunct="1">
+        <a:lnSpc>
+          <a:spcPct val="90000"/>
+        </a:lnSpc>
         <a:spcBef>
-          <a:spcPct val="20000"/>
+          <a:spcPts val="500"/>
         </a:spcBef>
-        <a:buFont typeface="Arial"/>
+        <a:buFont typeface="Arial" panose="020B0604020202020204" pitchFamily="34" charset="0"/>
         <a:buChar char="•"/>
-        <a:defRPr sz="2000" kern="1200">
+        <a:defRPr sz="1800" kern="1200">
           <a:solidFill>
             <a:schemeClr val="tx1"/>
           </a:solidFill>
@@ -2948,13 +2811,16 @@
           <a:cs typeface="+mn-cs"/>
         </a:defRPr>
       </a:lvl7pPr>
-      <a:lvl8pPr marL="3429000" indent="-228600" algn="l" defTabSz="457200" rtl="0" eaLnBrk="1" latinLnBrk="0" hangingPunct="1">
+      <a:lvl8pPr marL="3429000" indent="-228600" algn="l" defTabSz="914400" rtl="0" eaLnBrk="1" latinLnBrk="0" hangingPunct="1">
+        <a:lnSpc>
+          <a:spcPct val="90000"/>
+        </a:lnSpc>
         <a:spcBef>
-          <a:spcPct val="20000"/>
+          <a:spcPts val="500"/>
         </a:spcBef>
-        <a:buFont typeface="Arial"/>
+        <a:buFont typeface="Arial" panose="020B0604020202020204" pitchFamily="34" charset="0"/>
         <a:buChar char="•"/>
-        <a:defRPr sz="2000" kern="1200">
+        <a:defRPr sz="1800" kern="1200">
           <a:solidFill>
             <a:schemeClr val="tx1"/>
           </a:solidFill>
@@ -2963,13 +2829,16 @@
           <a:cs typeface="+mn-cs"/>
         </a:defRPr>
       </a:lvl8pPr>
-      <a:lvl9pPr marL="3886200" indent="-228600" algn="l" defTabSz="457200" rtl="0" eaLnBrk="1" latinLnBrk="0" hangingPunct="1">
+      <a:lvl9pPr marL="3886200" indent="-228600" algn="l" defTabSz="914400" rtl="0" eaLnBrk="1" latinLnBrk="0" hangingPunct="1">
+        <a:lnSpc>
+          <a:spcPct val="90000"/>
+        </a:lnSpc>
         <a:spcBef>
-          <a:spcPct val="20000"/>
+          <a:spcPts val="500"/>
         </a:spcBef>
-        <a:buFont typeface="Arial"/>
+        <a:buFont typeface="Arial" panose="020B0604020202020204" pitchFamily="34" charset="0"/>
         <a:buChar char="•"/>
-        <a:defRPr sz="2000" kern="1200">
+        <a:defRPr sz="1800" kern="1200">
           <a:solidFill>
             <a:schemeClr val="tx1"/>
           </a:solidFill>
@@ -2983,7 +2852,7 @@
       <a:defPPr>
         <a:defRPr lang="en-US"/>
       </a:defPPr>
-      <a:lvl1pPr marL="0" algn="l" defTabSz="457200" rtl="0" eaLnBrk="1" latinLnBrk="0" hangingPunct="1">
+      <a:lvl1pPr marL="0" algn="l" defTabSz="914400" rtl="0" eaLnBrk="1" latinLnBrk="0" hangingPunct="1">
         <a:defRPr sz="1800" kern="1200">
           <a:solidFill>
             <a:schemeClr val="tx1"/>
@@ -2993,7 +2862,7 @@
           <a:cs typeface="+mn-cs"/>
         </a:defRPr>
       </a:lvl1pPr>
-      <a:lvl2pPr marL="457200" algn="l" defTabSz="457200" rtl="0" eaLnBrk="1" latinLnBrk="0" hangingPunct="1">
+      <a:lvl2pPr marL="457200" algn="l" defTabSz="914400" rtl="0" eaLnBrk="1" latinLnBrk="0" hangingPunct="1">
         <a:defRPr sz="1800" kern="1200">
           <a:solidFill>
             <a:schemeClr val="tx1"/>
@@ -3003,7 +2872,7 @@
           <a:cs typeface="+mn-cs"/>
         </a:defRPr>
       </a:lvl2pPr>
-      <a:lvl3pPr marL="914400" algn="l" defTabSz="457200" rtl="0" eaLnBrk="1" latinLnBrk="0" hangingPunct="1">
+      <a:lvl3pPr marL="914400" algn="l" defTabSz="914400" rtl="0" eaLnBrk="1" latinLnBrk="0" hangingPunct="1">
         <a:defRPr sz="1800" kern="1200">
           <a:solidFill>
             <a:schemeClr val="tx1"/>
@@ -3013,7 +2882,7 @@
           <a:cs typeface="+mn-cs"/>
         </a:defRPr>
       </a:lvl3pPr>
-      <a:lvl4pPr marL="1371600" algn="l" defTabSz="457200" rtl="0" eaLnBrk="1" latinLnBrk="0" hangingPunct="1">
+      <a:lvl4pPr marL="1371600" algn="l" defTabSz="914400" rtl="0" eaLnBrk="1" latinLnBrk="0" hangingPunct="1">
         <a:defRPr sz="1800" kern="1200">
           <a:solidFill>
             <a:schemeClr val="tx1"/>
@@ -3023,7 +2892,7 @@
           <a:cs typeface="+mn-cs"/>
         </a:defRPr>
       </a:lvl4pPr>
-      <a:lvl5pPr marL="1828800" algn="l" defTabSz="457200" rtl="0" eaLnBrk="1" latinLnBrk="0" hangingPunct="1">
+      <a:lvl5pPr marL="1828800" algn="l" defTabSz="914400" rtl="0" eaLnBrk="1" latinLnBrk="0" hangingPunct="1">
         <a:defRPr sz="1800" kern="1200">
           <a:solidFill>
             <a:schemeClr val="tx1"/>
@@ -3033,7 +2902,7 @@
           <a:cs typeface="+mn-cs"/>
         </a:defRPr>
       </a:lvl5pPr>
-      <a:lvl6pPr marL="2286000" algn="l" defTabSz="457200" rtl="0" eaLnBrk="1" latinLnBrk="0" hangingPunct="1">
+      <a:lvl6pPr marL="2286000" algn="l" defTabSz="914400" rtl="0" eaLnBrk="1" latinLnBrk="0" hangingPunct="1">
         <a:defRPr sz="1800" kern="1200">
           <a:solidFill>
             <a:schemeClr val="tx1"/>
@@ -3043,7 +2912,7 @@
           <a:cs typeface="+mn-cs"/>
         </a:defRPr>
       </a:lvl6pPr>
-      <a:lvl7pPr marL="2743200" algn="l" defTabSz="457200" rtl="0" eaLnBrk="1" latinLnBrk="0" hangingPunct="1">
+      <a:lvl7pPr marL="2743200" algn="l" defTabSz="914400" rtl="0" eaLnBrk="1" latinLnBrk="0" hangingPunct="1">
         <a:defRPr sz="1800" kern="1200">
           <a:solidFill>
             <a:schemeClr val="tx1"/>
@@ -3053,7 +2922,7 @@
           <a:cs typeface="+mn-cs"/>
         </a:defRPr>
       </a:lvl7pPr>
-      <a:lvl8pPr marL="3200400" algn="l" defTabSz="457200" rtl="0" eaLnBrk="1" latinLnBrk="0" hangingPunct="1">
+      <a:lvl8pPr marL="3200400" algn="l" defTabSz="914400" rtl="0" eaLnBrk="1" latinLnBrk="0" hangingPunct="1">
         <a:defRPr sz="1800" kern="1200">
           <a:solidFill>
             <a:schemeClr val="tx1"/>
@@ -3063,7 +2932,7 @@
           <a:cs typeface="+mn-cs"/>
         </a:defRPr>
       </a:lvl8pPr>
-      <a:lvl9pPr marL="3657600" algn="l" defTabSz="457200" rtl="0" eaLnBrk="1" latinLnBrk="0" hangingPunct="1">
+      <a:lvl9pPr marL="3657600" algn="l" defTabSz="914400" rtl="0" eaLnBrk="1" latinLnBrk="0" hangingPunct="1">
         <a:defRPr sz="1800" kern="1200">
           <a:solidFill>
             <a:schemeClr val="tx1"/>
@@ -3090,44 +2959,41 @@
       <p:grpSpPr/>
       <p:sp>
         <p:nvSpPr>
-          <p:cNvPr id="2" name="Rectangle 1"/>
-          <p:cNvSpPr/>
-          <p:nvPr/>
-        </p:nvSpPr>
-        <p:spPr>
-          <a:xfrm>
-            <a:off x="838200" y="365126"/>
-            <a:ext cx="10515600" cy="581932"/>
-          </a:xfrm>
-          <a:prstGeom prst="rect">
-            <a:avLst/>
-          </a:prstGeom>
-        </p:spPr>
-        <p:style>
-          <a:lnRef idx="1">
-            <a:schemeClr val="accent1"/>
-          </a:lnRef>
-          <a:fillRef idx="3">
-            <a:schemeClr val="accent1"/>
-          </a:fillRef>
-          <a:effectRef idx="2">
-            <a:schemeClr val="accent1"/>
-          </a:effectRef>
-          <a:fontRef idx="minor">
-            <a:schemeClr val="lt1"/>
-          </a:fontRef>
-        </p:style>
-        <p:txBody>
-          <a:bodyPr rtlCol="0" anchor="ctr"/>
-          <a:lstStyle/>
-          <a:p>
-            <a:pPr algn="ctr"/>
-          </a:p>
+          <p:cNvPr id="2" name="Title 1"/>
+          <p:cNvSpPr>
+            <a:spLocks noGrp="1"/>
+          </p:cNvSpPr>
+          <p:nvPr>
+            <p:ph type="title"/>
+          </p:nvPr>
+        </p:nvSpPr>
+        <p:spPr/>
+        <p:txBody>
+          <a:bodyPr/>
+          <a:lstStyle/>
+          <a:p/>
+        </p:txBody>
+      </p:sp>
+      <p:sp>
+        <p:nvSpPr>
+          <p:cNvPr id="3" name="Content Placeholder 2"/>
+          <p:cNvSpPr>
+            <a:spLocks noGrp="1"/>
+          </p:cNvSpPr>
+          <p:nvPr>
+            <p:ph type="obj" idx="1"/>
+          </p:nvPr>
+        </p:nvSpPr>
+        <p:spPr/>
+        <p:txBody>
+          <a:bodyPr/>
+          <a:lstStyle/>
+          <a:p/>
         </p:txBody>
       </p:sp>
       <p:pic>
         <p:nvPicPr>
-          <p:cNvPr id="3" name="Picture 2" descr="image1.png"/>
+          <p:cNvPr id="4" name="Picture 3" descr="image1.png"/>
           <p:cNvPicPr>
             <a:picLocks noChangeAspect="1"/>
           </p:cNvPicPr>
@@ -3141,8 +3007,8 @@
         </p:blipFill>
         <p:spPr>
           <a:xfrm>
-            <a:off x="411995" y="277586"/>
-            <a:ext cx="11106751" cy="6858000"/>
+            <a:off x="412028" y="277611"/>
+            <a:ext cx="11106759" cy="6858000"/>
           </a:xfrm>
           <a:prstGeom prst="rect">
             <a:avLst/>
@@ -3168,39 +3034,39 @@
         <a:sysClr val="window" lastClr="FFFFFF"/>
       </a:lt1>
       <a:dk2>
-        <a:srgbClr val="1F497D"/>
+        <a:srgbClr val="44546A"/>
       </a:dk2>
       <a:lt2>
-        <a:srgbClr val="EEECE1"/>
+        <a:srgbClr val="E7E6E6"/>
       </a:lt2>
       <a:accent1>
-        <a:srgbClr val="4F81BD"/>
+        <a:srgbClr val="5B9BD5"/>
       </a:accent1>
       <a:accent2>
-        <a:srgbClr val="C0504D"/>
+        <a:srgbClr val="ED7D31"/>
       </a:accent2>
       <a:accent3>
-        <a:srgbClr val="9BBB59"/>
+        <a:srgbClr val="A5A5A5"/>
       </a:accent3>
       <a:accent4>
-        <a:srgbClr val="8064A2"/>
+        <a:srgbClr val="FFC000"/>
       </a:accent4>
       <a:accent5>
-        <a:srgbClr val="4BACC6"/>
+        <a:srgbClr val="4472C4"/>
       </a:accent5>
       <a:accent6>
-        <a:srgbClr val="F79646"/>
+        <a:srgbClr val="70AD47"/>
       </a:accent6>
       <a:hlink>
-        <a:srgbClr val="0000FF"/>
+        <a:srgbClr val="0563C1"/>
       </a:hlink>
       <a:folHlink>
-        <a:srgbClr val="800080"/>
+        <a:srgbClr val="954F72"/>
       </a:folHlink>
     </a:clrScheme>
     <a:fontScheme name="Office">
       <a:majorFont>
-        <a:latin typeface="Calibri"/>
+        <a:latin typeface="Calibri Light" panose="020F0302020204030204"/>
         <a:ea typeface=""/>
         <a:cs typeface=""/>
         <a:font script="Jpan" typeface="ＭＳ Ｐゴシック"/>
@@ -3235,7 +3101,7 @@
         <a:font script="Geor" typeface="Sylfaen"/>
       </a:majorFont>
       <a:minorFont>
-        <a:latin typeface="Calibri"/>
+        <a:latin typeface="Calibri" panose="020F0502020204030204"/>
         <a:ea typeface=""/>
         <a:cs typeface=""/>
         <a:font script="Jpan" typeface="ＭＳ Ｐゴシック"/>
@@ -3279,200 +3145,141 @@
           <a:gsLst>
             <a:gs pos="0">
               <a:schemeClr val="phClr">
-                <a:tint val="50000"/>
-                <a:satMod val="300000"/>
+                <a:lumMod val="110000"/>
+                <a:satMod val="105000"/>
+                <a:tint val="67000"/>
               </a:schemeClr>
             </a:gs>
-            <a:gs pos="35000">
+            <a:gs pos="50000">
               <a:schemeClr val="phClr">
-                <a:tint val="37000"/>
-                <a:satMod val="300000"/>
+                <a:lumMod val="105000"/>
+                <a:satMod val="103000"/>
+                <a:tint val="73000"/>
               </a:schemeClr>
             </a:gs>
             <a:gs pos="100000">
               <a:schemeClr val="phClr">
-                <a:tint val="15000"/>
-                <a:satMod val="350000"/>
+                <a:lumMod val="105000"/>
+                <a:satMod val="109000"/>
+                <a:tint val="81000"/>
               </a:schemeClr>
             </a:gs>
           </a:gsLst>
-          <a:lin ang="16200000" scaled="1"/>
+          <a:lin ang="5400000" scaled="0"/>
         </a:gradFill>
         <a:gradFill rotWithShape="1">
           <a:gsLst>
             <a:gs pos="0">
               <a:schemeClr val="phClr">
-                <a:tint val="100000"/>
+                <a:satMod val="103000"/>
+                <a:lumMod val="102000"/>
+                <a:tint val="94000"/>
+              </a:schemeClr>
+            </a:gs>
+            <a:gs pos="50000">
+              <a:schemeClr val="phClr">
+                <a:satMod val="110000"/>
+                <a:lumMod val="100000"/>
                 <a:shade val="100000"/>
-                <a:satMod val="130000"/>
               </a:schemeClr>
             </a:gs>
             <a:gs pos="100000">
               <a:schemeClr val="phClr">
-                <a:tint val="50000"/>
-                <a:shade val="100000"/>
-                <a:satMod val="350000"/>
+                <a:lumMod val="99000"/>
+                <a:satMod val="120000"/>
+                <a:shade val="78000"/>
               </a:schemeClr>
             </a:gs>
           </a:gsLst>
-          <a:lin ang="16200000" scaled="0"/>
+          <a:lin ang="5400000" scaled="0"/>
         </a:gradFill>
       </a:fillStyleLst>
       <a:lnStyleLst>
-        <a:ln w="9525" cap="flat" cmpd="sng" algn="ctr">
-          <a:solidFill>
-            <a:schemeClr val="phClr">
-              <a:shade val="95000"/>
-              <a:satMod val="105000"/>
-            </a:schemeClr>
-          </a:solidFill>
-          <a:prstDash val="solid"/>
-        </a:ln>
-        <a:ln w="25400" cap="flat" cmpd="sng" algn="ctr">
+        <a:ln w="6350" cap="flat" cmpd="sng" algn="ctr">
           <a:solidFill>
             <a:schemeClr val="phClr"/>
           </a:solidFill>
           <a:prstDash val="solid"/>
+          <a:miter lim="800000"/>
         </a:ln>
-        <a:ln w="38100" cap="flat" cmpd="sng" algn="ctr">
+        <a:ln w="12700" cap="flat" cmpd="sng" algn="ctr">
           <a:solidFill>
             <a:schemeClr val="phClr"/>
           </a:solidFill>
           <a:prstDash val="solid"/>
+          <a:miter lim="800000"/>
+        </a:ln>
+        <a:ln w="19050" cap="flat" cmpd="sng" algn="ctr">
+          <a:solidFill>
+            <a:schemeClr val="phClr"/>
+          </a:solidFill>
+          <a:prstDash val="solid"/>
+          <a:miter lim="800000"/>
         </a:ln>
       </a:lnStyleLst>
       <a:effectStyleLst>
         <a:effectStyle>
+          <a:effectLst/>
+        </a:effectStyle>
+        <a:effectStyle>
+          <a:effectLst/>
+        </a:effectStyle>
+        <a:effectStyle>
           <a:effectLst>
-            <a:outerShdw blurRad="40000" dist="20000" dir="5400000" rotWithShape="0">
+            <a:outerShdw blurRad="57150" dist="19050" dir="5400000" algn="ctr" rotWithShape="0">
               <a:srgbClr val="000000">
-                <a:alpha val="38000"/>
+                <a:alpha val="63000"/>
               </a:srgbClr>
             </a:outerShdw>
           </a:effectLst>
-        </a:effectStyle>
-        <a:effectStyle>
-          <a:effectLst>
-            <a:outerShdw blurRad="40000" dist="23000" dir="5400000" rotWithShape="0">
-              <a:srgbClr val="000000">
-                <a:alpha val="35000"/>
-              </a:srgbClr>
-            </a:outerShdw>
-          </a:effectLst>
-        </a:effectStyle>
-        <a:effectStyle>
-          <a:effectLst>
-            <a:outerShdw blurRad="40000" dist="23000" dir="5400000" rotWithShape="0">
-              <a:srgbClr val="000000">
-                <a:alpha val="35000"/>
-              </a:srgbClr>
-            </a:outerShdw>
-          </a:effectLst>
-          <a:scene3d>
-            <a:camera prst="orthographicFront">
-              <a:rot lat="0" lon="0" rev="0"/>
-            </a:camera>
-            <a:lightRig rig="threePt" dir="t">
-              <a:rot lat="0" lon="0" rev="1200000"/>
-            </a:lightRig>
-          </a:scene3d>
-          <a:sp3d>
-            <a:bevelT w="63500" h="25400"/>
-          </a:sp3d>
         </a:effectStyle>
       </a:effectStyleLst>
       <a:bgFillStyleLst>
         <a:solidFill>
           <a:schemeClr val="phClr"/>
         </a:solidFill>
+        <a:solidFill>
+          <a:schemeClr val="phClr">
+            <a:tint val="95000"/>
+            <a:satMod val="170000"/>
+          </a:schemeClr>
+        </a:solidFill>
         <a:gradFill rotWithShape="1">
           <a:gsLst>
             <a:gs pos="0">
               <a:schemeClr val="phClr">
-                <a:tint val="40000"/>
-                <a:satMod val="350000"/>
+                <a:tint val="93000"/>
+                <a:satMod val="150000"/>
+                <a:shade val="98000"/>
+                <a:lumMod val="102000"/>
               </a:schemeClr>
             </a:gs>
-            <a:gs pos="40000">
+            <a:gs pos="50000">
               <a:schemeClr val="phClr">
-                <a:tint val="45000"/>
-                <a:shade val="99000"/>
-                <a:satMod val="350000"/>
+                <a:tint val="98000"/>
+                <a:satMod val="130000"/>
+                <a:shade val="90000"/>
+                <a:lumMod val="103000"/>
               </a:schemeClr>
             </a:gs>
             <a:gs pos="100000">
               <a:schemeClr val="phClr">
-                <a:shade val="20000"/>
-                <a:satMod val="255000"/>
+                <a:shade val="63000"/>
+                <a:satMod val="120000"/>
               </a:schemeClr>
             </a:gs>
           </a:gsLst>
-          <a:path path="circle">
-            <a:fillToRect l="50000" t="-80000" r="50000" b="180000"/>
-          </a:path>
-        </a:gradFill>
-        <a:gradFill rotWithShape="1">
-          <a:gsLst>
-            <a:gs pos="0">
-              <a:schemeClr val="phClr">
-                <a:tint val="80000"/>
-                <a:satMod val="300000"/>
-              </a:schemeClr>
-            </a:gs>
-            <a:gs pos="100000">
-              <a:schemeClr val="phClr">
-                <a:shade val="30000"/>
-                <a:satMod val="200000"/>
-              </a:schemeClr>
-            </a:gs>
-          </a:gsLst>
-          <a:path path="circle">
-            <a:fillToRect l="50000" t="50000" r="50000" b="50000"/>
-          </a:path>
+          <a:lin ang="5400000" scaled="0"/>
         </a:gradFill>
       </a:bgFillStyleLst>
     </a:fmtScheme>
   </a:themeElements>
-  <a:objectDefaults>
-    <a:spDef>
-      <a:spPr/>
-      <a:bodyPr/>
-      <a:lstStyle/>
-      <a:style>
-        <a:lnRef idx="1">
-          <a:schemeClr val="accent1"/>
-        </a:lnRef>
-        <a:fillRef idx="3">
-          <a:schemeClr val="accent1"/>
-        </a:fillRef>
-        <a:effectRef idx="2">
-          <a:schemeClr val="accent1"/>
-        </a:effectRef>
-        <a:fontRef idx="minor">
-          <a:schemeClr val="lt1"/>
-        </a:fontRef>
-      </a:style>
-    </a:spDef>
-    <a:lnDef>
-      <a:spPr/>
-      <a:bodyPr/>
-      <a:lstStyle/>
-      <a:style>
-        <a:lnRef idx="2">
-          <a:schemeClr val="accent1"/>
-        </a:lnRef>
-        <a:fillRef idx="0">
-          <a:schemeClr val="accent1"/>
-        </a:fillRef>
-        <a:effectRef idx="1">
-          <a:schemeClr val="accent1"/>
-        </a:effectRef>
-        <a:fontRef idx="minor">
-          <a:schemeClr val="tx1"/>
-        </a:fontRef>
-      </a:style>
-    </a:lnDef>
-  </a:objectDefaults>
+  <a:objectDefaults/>
   <a:extraClrSchemeLst/>
+  <a:extLst>
+    <a:ext uri="{05A4C25C-085E-4340-85A3-A5531E510DB2}">
+      <thm15:themeFamily xmlns:thm15="http://schemas.microsoft.com/office/thememl/2012/main" name="Office Theme" id="{62F939B6-93AF-4DB8-9C6B-D6C7DFDC589F}" vid="{4A3C46E8-61CC-4603-A589-7422A47A8E4A}"/>
+    </a:ext>
+  </a:extLst>
 </a:theme>
 </file>